--- a/presentations/2026-06 DevDays/DD26_T_260618_Lloyd-McKenzie_PublisherFeatures.pptx
+++ b/presentations/2026-06 DevDays/DD26_T_260618_Lloyd-McKenzie_PublisherFeatures.pptx
@@ -10134,6 +10134,36 @@
           </p:spPr>
         </p:pic>
       </p:grpSp>
+      <p:pic>
+        <p:nvPicPr>
+          <p:cNvPr id="10" name="Picture 9">
+            <a:extLst>
+              <a:ext uri="{FF2B5EF4-FFF2-40B4-BE49-F238E27FC236}">
+                <a16:creationId xmlns:a16="http://schemas.microsoft.com/office/drawing/2014/main" id="{794CE995-C906-AB16-90D9-12860A8069DB}"/>
+              </a:ext>
+            </a:extLst>
+          </p:cNvPr>
+          <p:cNvPicPr>
+            <a:picLocks noChangeAspect="1"/>
+          </p:cNvPicPr>
+          <p:nvPr/>
+        </p:nvPicPr>
+        <p:blipFill>
+          <a:blip r:embed="rId7"/>
+          <a:stretch>
+            <a:fillRect/>
+          </a:stretch>
+        </p:blipFill>
+        <p:spPr>
+          <a:xfrm>
+            <a:off x="732442" y="3686160"/>
+            <a:ext cx="2482712" cy="2482712"/>
+          </a:xfrm>
+          <a:prstGeom prst="rect">
+            <a:avLst/>
+          </a:prstGeom>
+        </p:spPr>
+      </p:pic>
     </p:spTree>
     <p:extLst>
       <p:ext uri="{BB962C8B-B14F-4D97-AF65-F5344CB8AC3E}">
@@ -10449,6 +10479,36 @@
           </a:p>
         </p:txBody>
       </p:sp>
+      <p:pic>
+        <p:nvPicPr>
+          <p:cNvPr id="5" name="Picture 4">
+            <a:extLst>
+              <a:ext uri="{FF2B5EF4-FFF2-40B4-BE49-F238E27FC236}">
+                <a16:creationId xmlns:a16="http://schemas.microsoft.com/office/drawing/2014/main" id="{6B5357A2-64C9-92F5-8BB5-F0120D11E30D}"/>
+              </a:ext>
+            </a:extLst>
+          </p:cNvPr>
+          <p:cNvPicPr>
+            <a:picLocks noChangeAspect="1"/>
+          </p:cNvPicPr>
+          <p:nvPr/>
+        </p:nvPicPr>
+        <p:blipFill>
+          <a:blip r:embed="rId3"/>
+          <a:stretch>
+            <a:fillRect/>
+          </a:stretch>
+        </p:blipFill>
+        <p:spPr>
+          <a:xfrm>
+            <a:off x="8871088" y="946288"/>
+            <a:ext cx="2482712" cy="2482712"/>
+          </a:xfrm>
+          <a:prstGeom prst="rect">
+            <a:avLst/>
+          </a:prstGeom>
+        </p:spPr>
+      </p:pic>
     </p:spTree>
     <p:extLst>
       <p:ext uri="{BB962C8B-B14F-4D97-AF65-F5344CB8AC3E}">

--- a/presentations/2026-06 DevDays/DD26_T_260618_Lloyd-McKenzie_PublisherFeatures.pptx
+++ b/presentations/2026-06 DevDays/DD26_T_260618_Lloyd-McKenzie_PublisherFeatures.pptx
@@ -734,7 +734,7 @@
           <a:bodyPr/>
           <a:lstStyle/>
           <a:p>
-            <a:endParaRPr lang="en-CA"/>
+            <a:endParaRPr lang="en-CA" dirty="0"/>
           </a:p>
         </p:txBody>
       </p:sp>
